--- a/impulso-empresarial/Impulso_Empresarial_LinkedIn.pptx
+++ b/impulso-empresarial/Impulso_Empresarial_LinkedIn.pptx
@@ -114,13 +114,13 @@
   <p:extLst>
     <p:ext uri="{521415D9-36F7-43E2-AB2F-B90AF26B5E84}">
       <p14:sectionLst xmlns:p14="http://schemas.microsoft.com/office/powerpoint/2010/main">
-        <p14:section name="Apertura" id="{416700e5-4500-13be-446e-e09debe1262a}">
+        <p14:section name="Apertura" id="{4bcc7d4c-0308-6f8a-b29f-a8e9d2edaa0b}">
           <p14:sldIdLst>
             <p14:sldId id="256"/>
             <p14:sldId id="257"/>
           </p14:sldIdLst>
         </p14:section>
-        <p14:section name="Propuesta" id="{73176758-6c8f-7519-e6c8-008345535949}">
+        <p14:section name="Propuesta" id="{49e5f024-5f0a-6ea7-43a0-e59dd4e8aaf6}">
           <p14:sldIdLst>
             <p14:sldId id="258"/>
             <p14:sldId id="259"/>
@@ -128,7 +128,7 @@
             <p14:sldId id="261"/>
           </p14:sldIdLst>
         </p14:section>
-        <p14:section name="Origen y cierre" id="{0fc3341d-b79e-cdd2-5602-600fbc2add39}">
+        <p14:section name="Origen y cierre" id="{bbcdce7d-8930-9784-e8ff-d13d05b18025}">
           <p14:sldIdLst>
             <p14:sldId id="262"/>
             <p14:sldId id="263"/>
@@ -812,7 +812,7 @@
           <a:p>
             <a:r>
               <a:rPr lang="en-US" dirty="0"/>
-              <a:t>Portada. Impulso Empresarial se presenta como una idea de negocio desarrollada en la tesis de Ingeniería Comercial de Derlis Javier Morinigo Ovelar; no como una empresa en operación. El diagrama resume la propuesta: datos de ventas, costos y caja integrados en información para tomar decisiones.</a:t>
+              <a:t>Portada. Impulso Empresarial se presenta como una idea de negocio desarrollada en la tesis de Ingeniería Comercial de Derlis Javier Morinigo Ovelar; no como una empresa en operación. El diagrama resume la propuesta: datos de ventas, costos y caja integrados en información para tomar decisiones. Referencia: Trabajo Profesional de Grado (2.ª corrección, 13-09): título de la obra y resumen ejecutivo. No se usa el título académico completo de la tesis.</a:t>
             </a:r>
             <a:endParaRPr lang="en-US" dirty="0"/>
           </a:p>
@@ -900,7 +900,7 @@
           <a:p>
             <a:r>
               <a:rPr lang="en-US" dirty="0"/>
-              <a:t>Las tres preguntas son situaciones habituales de gestión, no resultados de una encuesta ni estadísticas verificadas. Separan tres conceptos distintos: vender (ventas), ganar (rentabilidad: lo que queda después de costos y gastos) y cobrar (caja y liquidez). Un negocio puede vender más y aun así ganar menos, o ganar y no tener efectivo disponible.</a:t>
+              <a:t>Las tres preguntas son situaciones habituales de gestión, no resultados de una encuesta ni estadísticas verificadas. Separan tres conceptos distintos: vender (ventas), ganar (rentabilidad: lo que queda después de costos y gastos) y cobrar (caja y liquidez). Un negocio puede vender más y aun así ganar menos, o ganar y no tener efectivo disponible. Referencia: Trabajo Profesional de Grado (2.ª corrección, 13-09), 2.2.1: aplicaciones al seguimiento de ventas, costos y gastos, a la rentabilidad por producto o cliente y al control de inventarios y cobranzas. La pregunta de caja (efectivo de las próximas semanas) va un paso más allá del alcance escrito en la tesis, que menciona cobranzas pero no proyección de caja.</a:t>
             </a:r>
             <a:endParaRPr lang="en-US" dirty="0"/>
           </a:p>
@@ -988,7 +988,7 @@
           <a:p>
             <a:r>
               <a:rPr lang="en-US" dirty="0"/>
-              <a:t>Propuesta de consultoría unipersonal en Inteligencia de Negocios (Business Intelligence, BI) para micro, pequeñas y medianas empresas. «Ordenar, visualizar, decidir» es una síntesis comercial para este carrusel. Foco inicial: San Lorenzo y el área metropolitana de Paraguay. Es una idea de negocio de la tesis: no se afirma que esté operando ni que tenga clientes.</a:t>
+              <a:t>Propuesta de consultoría unipersonal en Inteligencia de Negocios (Business Intelligence, BI) para micro, pequeñas y medianas empresas. «Ordenar, visualizar, decidir» es una síntesis comercial para este carrusel. Foco inicial: San Lorenzo y el área metropolitana de Paraguay. Es una idea de negocio de la tesis: no se afirma que esté operando ni que tenga clientes. Referencia: Trabajo Profesional de Grado (2.ª corrección, 13-09): resumen ejecutivo; 2.1 y Tabla 1 (consultora unipersonal, MIPYMES, San Lorenzo y área metropolitana, atención presencial y virtual); 2.2.2 (mercado de referencia).</a:t>
             </a:r>
             <a:endParaRPr lang="en-US" dirty="0"/>
           </a:p>
@@ -1076,7 +1076,7 @@
           <a:p>
             <a:r>
               <a:rPr lang="en-US" dirty="0"/>
-              <a:t>Alcance propuesto del servicio: diagnóstico de información y necesidades, tableros de control, automatización de reportes, definición y análisis de indicadores, capacitación y acompañamiento posterior. Herramientas: Excel y Power BI. Lenguaje de propuesta: no se publican precios, paquetes comerciales ni compromisos contractuales.</a:t>
+              <a:t>Alcance propuesto del servicio: diagnóstico de información y necesidades, tableros de control, automatización de reportes, definición y análisis de indicadores, capacitación y acompañamiento posterior. Herramientas: Excel y Power BI. Lenguaje de propuesta: no se publican precios, paquetes comerciales ni compromisos contractuales. Referencia: Trabajo Profesional de Grado (2.ª corrección, 13-09): resumen ejecutivo (diagnóstico, tableros, automatización de reportes, análisis de indicadores, mantenimiento mensual); 2.2.1 (capacitación inicial; mantenimiento y soporte mensual); Tabla 2 (integración de planillas Excel); 2.8.1 (Power BI). Los niveles básico, estándar y avanzado y los precios de la Tabla 10 se omiten a propósito.</a:t>
             </a:r>
             <a:endParaRPr lang="en-US" dirty="0"/>
           </a:p>
@@ -1175,7 +1175,8 @@
 Margen bruto: antes de gastos operativos, intereses e impuestos. No es utilidad neta.
 Cuentas por cobrar al cierre: Gs. 45 millones. Es un saldo adicional simulado; no son cobros del mes ni flujo de caja, ni una parte adicional de las ventas que deba sumarse a los Gs. 120 millones.
 Lectura: la Línea B tiene la mitad del margen de A y C. El tablero no da la respuesta; indica dónde revisar (precios, costos o descuentos) antes de decidir.
-El gráfico es nativo de PowerPoint: los datos se editan con clic derecho &gt; Editar datos.</a:t>
+El gráfico es nativo de PowerPoint: los datos se editan con clic derecho &gt; Editar datos.
+Referencia: Trabajo Profesional de Grado (2.ª corrección, 13-09), 2.2.1: «un tablero comercial podrá mostrar la evolución de las ventas y los márgenes por producto». Los importes del ejemplo no provienen de la tesis.</a:t>
             </a:r>
             <a:endParaRPr lang="en-US" dirty="0"/>
           </a:p>
@@ -1263,7 +1264,7 @@
           <a:p>
             <a:r>
               <a:rPr lang="en-US" dirty="0"/>
-              <a:t>Proceso propuesto en cuatro pasos: entender las decisiones, ordenar y validar los datos, implementar tablero y reportes según el alcance acordado, y acompañar el uso de los indicadores. Modalidad: implementación por proyecto más seguimiento mensual. No se fijan plazos, cantidad de reuniones ni compromisos contractuales.</a:t>
+              <a:t>Proceso propuesto en cuatro pasos: entender las decisiones, ordenar y validar los datos, implementar tablero y reportes según el alcance acordado, y acompañar el uso de los indicadores. Modalidad: implementación por proyecto más seguimiento mensual. No se fijan plazos, cantidad de reuniones ni compromisos contractuales. Referencia: Trabajo Profesional de Grado (2.ª corrección, 13-09): 7.4, Tablas 24, 25 y 27 (diagnóstico y propuesta, ejecución del servicio, seguimiento posventa) y 2.2.1 (implementación por proyecto; mantenimiento como prestación recurrente). En la tesis la prestación mensual se denomina «mantenimiento y soporte»; «seguimiento mensual» es la forma simplificada usada en el carrusel.</a:t>
             </a:r>
             <a:endParaRPr lang="en-US" dirty="0"/>
           </a:p>
@@ -1351,7 +1352,7 @@
           <a:p>
             <a:r>
               <a:rPr lang="en-US" dirty="0"/>
-              <a:t>Contexto profesional del autor, sin convertir la página en un currículum. Impulso Empresarial se desarrolló como proyecto de tesis de Ingeniería Comercial; no se usa el título de Ingeniero Comercial ni se afirma que la tesis ya fue defendida. No se menciona al empleador actual ni logros comerciales de Impulso Empresarial.</a:t>
+              <a:t>Contexto profesional del autor, sin convertir la página en un currículum. Impulso Empresarial se desarrolló como proyecto de tesis de Ingeniería Comercial; no se usa el título de Ingeniero Comercial ni se afirma que la tesis ya fue defendida. No se menciona al empleador actual ni logros comerciales de Impulso Empresarial. Referencia: Trabajo Profesional de Grado (2.ª corrección, 13-09): portada (autor y carrera) y 4.8 (la experiencia profesional del consultor como parte de la ventaja competitiva).</a:t>
             </a:r>
             <a:endParaRPr lang="en-US" dirty="0"/>
           </a:p>
@@ -1439,7 +1440,7 @@
           <a:p>
             <a:r>
               <a:rPr lang="en-US" dirty="0"/>
-              <a:t>Invitación a conversar para seguir afinando la propuesta y a visitar el perfil de LinkedIn. No se agregan teléfono, correo, QR, enlaces ni ofertas (por ejemplo, diagnósticos gratuitos).</a:t>
+              <a:t>Invitación a conversar para seguir afinando la propuesta y a visitar el perfil de LinkedIn. No se agregan teléfono, correo, QR, enlaces ni ofertas (por ejemplo, diagnósticos gratuitos). Referencia: Trabajo Profesional de Grado (2.ª corrección, 13-09): 2.8.1 prevé LinkedIn como canal de contacto; el resumen ejecutivo indica que la captación y la disposición de pago deben validarse antes de implementar. Las conversaciones que genere el carrusel son señales cualitativas, no una validación de mercado.</a:t>
             </a:r>
             <a:endParaRPr lang="en-US" dirty="0"/>
           </a:p>
